--- a/VPC_презентация.pptx
+++ b/VPC_презентация.pptx
@@ -8963,7 +8963,7 @@
                 </a:solidFill>
                 <a:latin typeface="Calibri"/>
               </a:rPr>
-              <a:t>доля агентского канала в сделках (норма 45–55%) — слабость своих отделов</a:t>
+              <a:t>доля агентского канала в сделках (норма 45–55%) — каналом важно управлять</a:t>
             </a:r>
           </a:p>
         </p:txBody>
@@ -11637,7 +11637,7 @@
                 </a:solidFill>
                 <a:latin typeface="Calibri"/>
               </a:rPr>
-              <a:t>Зависимость от агентов 85–90%</a:t>
+              <a:t>85–90% через агентов — каналом сложно управлять</a:t>
             </a:r>
           </a:p>
         </p:txBody>

--- a/VPC_презентация.pptx
+++ b/VPC_презентация.pptx
@@ -9261,8 +9261,8 @@
         </p:nvSpPr>
         <p:spPr>
           <a:xfrm>
-            <a:off x="822960" y="1463040"/>
-            <a:ext cx="10424160" cy="2926080"/>
+            <a:off x="822960" y="1417320"/>
+            <a:ext cx="10607040" cy="2926080"/>
           </a:xfrm>
           <a:prstGeom prst="rect">
             <a:avLst/>
@@ -9287,31 +9287,66 @@
               </a:spcAft>
             </a:pPr>
             <a:r>
-              <a:rPr sz="3000" b="1" i="0">
+              <a:rPr sz="2900" b="1" i="0">
                 <a:solidFill>
                   <a:srgbClr val="FFFFFF"/>
                 </a:solidFill>
                 <a:latin typeface="Calibri"/>
               </a:rPr>
-              <a:t>В этой реальности нельзя выиграть, </a:t>
-            </a:r>
-            <a:r>
-              <a:rPr sz="3000" b="1" i="0">
+              <a:t>Когда деньги дорогие, а план не закрывается —</a:t>
+            </a:r>
+          </a:p>
+          <a:p>
+            <a:pPr algn="l">
+              <a:lnSpc>
+                <a:spcPct val="112000"/>
+              </a:lnSpc>
+              <a:spcBef>
+                <a:spcPts val="0"/>
+              </a:spcBef>
+              <a:spcAft>
+                <a:spcPts val="400"/>
+              </a:spcAft>
+            </a:pPr>
+            <a:r>
+              <a:rPr sz="2900" b="1" i="0">
+                <a:solidFill>
+                  <a:srgbClr val="FFFFFF"/>
+                </a:solidFill>
+                <a:latin typeface="Calibri"/>
+              </a:rPr>
+              <a:t>рекламой это не лечится. </a:t>
+            </a:r>
+            <a:r>
+              <a:rPr sz="2900" b="1" i="0">
                 <a:solidFill>
                   <a:srgbClr val="F4B98F"/>
                 </a:solidFill>
                 <a:latin typeface="Calibri"/>
               </a:rPr>
-              <a:t>докупая рекламу</a:t>
-            </a:r>
-            <a:r>
-              <a:rPr sz="3000" b="1" i="0">
+              <a:t>План закрывает система:</a:t>
+            </a:r>
+          </a:p>
+          <a:p>
+            <a:pPr algn="l">
+              <a:lnSpc>
+                <a:spcPct val="112000"/>
+              </a:lnSpc>
+              <a:spcBef>
+                <a:spcPts val="0"/>
+              </a:spcBef>
+              <a:spcAft>
+                <a:spcPts val="400"/>
+              </a:spcAft>
+            </a:pPr>
+            <a:r>
+              <a:rPr sz="2900" b="1" i="0">
                 <a:solidFill>
                   <a:srgbClr val="FFFFFF"/>
                 </a:solidFill>
                 <a:latin typeface="Calibri"/>
               </a:rPr>
-              <a:t>.</a:t>
+              <a:t>продукт, цена, финмодель, маркетинг, продажи —</a:t>
             </a:r>
           </a:p>
           <a:p>
@@ -9327,53 +9362,13 @@
               </a:spcAft>
             </a:pPr>
             <a:r>
-              <a:rPr sz="3000" b="1" i="0">
+              <a:rPr sz="2900" b="1" i="0">
                 <a:solidFill>
                   <a:srgbClr val="FFFFFF"/>
                 </a:solidFill>
                 <a:latin typeface="Calibri"/>
               </a:rPr>
-              <a:t>Выигрывает тот, кто отстроил продукт, бренд и воронку</a:t>
-            </a:r>
-          </a:p>
-          <a:p>
-            <a:pPr algn="l">
-              <a:lnSpc>
-                <a:spcPct val="112000"/>
-              </a:lnSpc>
-              <a:spcBef>
-                <a:spcPts val="0"/>
-              </a:spcBef>
-              <a:spcAft>
-                <a:spcPts val="400"/>
-              </a:spcAft>
-            </a:pPr>
-            <a:r>
-              <a:rPr sz="3000" b="1" i="0">
-                <a:solidFill>
-                  <a:srgbClr val="FFFFFF"/>
-                </a:solidFill>
-                <a:latin typeface="Calibri"/>
-              </a:rPr>
-              <a:t>как </a:t>
-            </a:r>
-            <a:r>
-              <a:rPr sz="3000" b="1" i="0">
-                <a:solidFill>
-                  <a:srgbClr val="F4B98F"/>
-                </a:solidFill>
-                <a:latin typeface="Calibri"/>
-              </a:rPr>
-              <a:t>единую систему</a:t>
-            </a:r>
-            <a:r>
-              <a:rPr sz="3000" b="1" i="0">
-                <a:solidFill>
-                  <a:srgbClr val="FFFFFF"/>
-                </a:solidFill>
-                <a:latin typeface="Calibri"/>
-              </a:rPr>
-              <a:t>.</a:t>
+              <a:t>сшитые в одну цифру и в P&amp;L.</a:t>
             </a:r>
           </a:p>
         </p:txBody>
@@ -9486,7 +9481,7 @@
                 </a:solidFill>
                 <a:latin typeface="Calibri"/>
               </a:rPr>
-              <a:t>единое окно полного цикла — продукт, исследования, бренд, сайты, перформанс, консалтинг продаж — </a:t>
+              <a:t>единое окно: продукт, цена, финмодель, маркетинг и продажи одной командой, сшитые с планом — </a:t>
             </a:r>
           </a:p>
           <a:p>
@@ -9508,7 +9503,7 @@
                 </a:solidFill>
                 <a:latin typeface="Calibri"/>
               </a:rPr>
-              <a:t>с ответственностью за результат «лиды → сделки», а не за клики.</a:t>
+              <a:t>с ответственностью за результат «лиды → сделки → план», а не за клики.</a:t>
             </a:r>
           </a:p>
         </p:txBody>
@@ -10408,7 +10403,7 @@
                 </a:solidFill>
                 <a:latin typeface="Calibri"/>
               </a:rPr>
-              <a:t>«Доверие подменяло управление» — потеря контроля</a:t>
+              <a:t>«Цифры есть, но решений по ним не принимают» — план оторван от финмодели</a:t>
             </a:r>
           </a:p>
         </p:txBody>
@@ -15669,17 +15664,17 @@
           <a:p>
             <a:pPr algn="l">
               <a:lnSpc>
-                <a:spcPct val="104000"/>
-              </a:lnSpc>
-              <a:spcBef>
-                <a:spcPts val="0"/>
-              </a:spcBef>
-              <a:spcAft>
-                <a:spcPts val="500"/>
-              </a:spcAft>
-            </a:pPr>
-            <a:r>
-              <a:rPr sz="1230" b="1">
+                <a:spcPct val="102000"/>
+              </a:lnSpc>
+              <a:spcBef>
+                <a:spcPts val="0"/>
+              </a:spcBef>
+              <a:spcAft>
+                <a:spcPts val="300"/>
+              </a:spcAft>
+            </a:pPr>
+            <a:r>
+              <a:rPr sz="1120" b="1">
                 <a:solidFill>
                   <a:srgbClr val="2E7D5B"/>
                 </a:solidFill>
@@ -15688,29 +15683,60 @@
               <a:t>•  </a:t>
             </a:r>
             <a:r>
-              <a:rPr sz="1230">
+              <a:rPr sz="1120">
                 <a:solidFill>
                   <a:srgbClr val="16130F"/>
                 </a:solidFill>
                 <a:latin typeface="Calibri"/>
               </a:rPr>
+              <a:t>Система вместо кусков: продукт, бренд, маркетинг и продажи на одну цифру — план</a:t>
+            </a:r>
+          </a:p>
+          <a:p>
+            <a:pPr algn="l">
+              <a:lnSpc>
+                <a:spcPct val="102000"/>
+              </a:lnSpc>
+              <a:spcBef>
+                <a:spcPts val="0"/>
+              </a:spcBef>
+              <a:spcAft>
+                <a:spcPts val="300"/>
+              </a:spcAft>
+            </a:pPr>
+            <a:r>
+              <a:rPr sz="1120" b="1">
+                <a:solidFill>
+                  <a:srgbClr val="2E7D5B"/>
+                </a:solidFill>
+                <a:latin typeface="Calibri"/>
+              </a:rPr>
+              <a:t>•  </a:t>
+            </a:r>
+            <a:r>
+              <a:rPr sz="1120">
+                <a:solidFill>
+                  <a:srgbClr val="16130F"/>
+                </a:solidFill>
+                <a:latin typeface="Calibri"/>
+              </a:rPr>
               <a:t>Премия к цене за бренд и продукт; ускорение распроданности → дешевле эскроу/ПФ</a:t>
             </a:r>
           </a:p>
           <a:p>
             <a:pPr algn="l">
               <a:lnSpc>
-                <a:spcPct val="104000"/>
-              </a:lnSpc>
-              <a:spcBef>
-                <a:spcPts val="0"/>
-              </a:spcBef>
-              <a:spcAft>
-                <a:spcPts val="500"/>
-              </a:spcAft>
-            </a:pPr>
-            <a:r>
-              <a:rPr sz="1230" b="1">
+                <a:spcPct val="102000"/>
+              </a:lnSpc>
+              <a:spcBef>
+                <a:spcPts val="0"/>
+              </a:spcBef>
+              <a:spcAft>
+                <a:spcPts val="300"/>
+              </a:spcAft>
+            </a:pPr>
+            <a:r>
+              <a:rPr sz="1120" b="1">
                 <a:solidFill>
                   <a:srgbClr val="2E7D5B"/>
                 </a:solidFill>
@@ -15719,7 +15745,7 @@
               <a:t>•  </a:t>
             </a:r>
             <a:r>
-              <a:rPr sz="1230">
+              <a:rPr sz="1120">
                 <a:solidFill>
                   <a:srgbClr val="16130F"/>
                 </a:solidFill>
@@ -15731,17 +15757,17 @@
           <a:p>
             <a:pPr algn="l">
               <a:lnSpc>
-                <a:spcPct val="104000"/>
-              </a:lnSpc>
-              <a:spcBef>
-                <a:spcPts val="0"/>
-              </a:spcBef>
-              <a:spcAft>
-                <a:spcPts val="500"/>
-              </a:spcAft>
-            </a:pPr>
-            <a:r>
-              <a:rPr sz="1230" b="1">
+                <a:spcPct val="102000"/>
+              </a:lnSpc>
+              <a:spcBef>
+                <a:spcPts val="0"/>
+              </a:spcBef>
+              <a:spcAft>
+                <a:spcPts val="300"/>
+              </a:spcAft>
+            </a:pPr>
+            <a:r>
+              <a:rPr sz="1120" b="1">
                 <a:solidFill>
                   <a:srgbClr val="2E7D5B"/>
                 </a:solidFill>
@@ -15750,7 +15776,7 @@
               <a:t>•  </a:t>
             </a:r>
             <a:r>
-              <a:rPr sz="1230">
+              <a:rPr sz="1120">
                 <a:solidFill>
                   <a:srgbClr val="16130F"/>
                 </a:solidFill>
@@ -15762,17 +15788,17 @@
           <a:p>
             <a:pPr algn="l">
               <a:lnSpc>
-                <a:spcPct val="104000"/>
-              </a:lnSpc>
-              <a:spcBef>
-                <a:spcPts val="0"/>
-              </a:spcBef>
-              <a:spcAft>
-                <a:spcPts val="500"/>
-              </a:spcAft>
-            </a:pPr>
-            <a:r>
-              <a:rPr sz="1230" b="1">
+                <a:spcPct val="102000"/>
+              </a:lnSpc>
+              <a:spcBef>
+                <a:spcPts val="0"/>
+              </a:spcBef>
+              <a:spcAft>
+                <a:spcPts val="300"/>
+              </a:spcAft>
+            </a:pPr>
+            <a:r>
+              <a:rPr sz="1120" b="1">
                 <a:solidFill>
                   <a:srgbClr val="2E7D5B"/>
                 </a:solidFill>
@@ -15781,7 +15807,7 @@
               <a:t>•  </a:t>
             </a:r>
             <a:r>
-              <a:rPr sz="1230">
+              <a:rPr sz="1120">
                 <a:solidFill>
                   <a:srgbClr val="16130F"/>
                 </a:solidFill>
@@ -15967,17 +15993,17 @@
           <a:p>
             <a:pPr algn="l">
               <a:lnSpc>
-                <a:spcPct val="104000"/>
-              </a:lnSpc>
-              <a:spcBef>
-                <a:spcPts val="0"/>
-              </a:spcBef>
-              <a:spcAft>
-                <a:spcPts val="500"/>
-              </a:spcAft>
-            </a:pPr>
-            <a:r>
-              <a:rPr sz="1230" b="1">
+                <a:spcPct val="102000"/>
+              </a:lnSpc>
+              <a:spcBef>
+                <a:spcPts val="0"/>
+              </a:spcBef>
+              <a:spcAft>
+                <a:spcPts val="300"/>
+              </a:spcAft>
+            </a:pPr>
+            <a:r>
+              <a:rPr sz="1120" b="1">
                 <a:solidFill>
                   <a:srgbClr val="BE4127"/>
                 </a:solidFill>
@@ -15986,7 +16012,7 @@
               <a:t>•  </a:t>
             </a:r>
             <a:r>
-              <a:rPr sz="1230">
+              <a:rPr sz="1120">
                 <a:solidFill>
                   <a:srgbClr val="16130F"/>
                 </a:solidFill>
@@ -15998,17 +16024,17 @@
           <a:p>
             <a:pPr algn="l">
               <a:lnSpc>
-                <a:spcPct val="104000"/>
-              </a:lnSpc>
-              <a:spcBef>
-                <a:spcPts val="0"/>
-              </a:spcBef>
-              <a:spcAft>
-                <a:spcPts val="500"/>
-              </a:spcAft>
-            </a:pPr>
-            <a:r>
-              <a:rPr sz="1230" b="1">
+                <a:spcPct val="102000"/>
+              </a:lnSpc>
+              <a:spcBef>
+                <a:spcPts val="0"/>
+              </a:spcBef>
+              <a:spcAft>
+                <a:spcPts val="300"/>
+              </a:spcAft>
+            </a:pPr>
+            <a:r>
+              <a:rPr sz="1120" b="1">
                 <a:solidFill>
                   <a:srgbClr val="BE4127"/>
                 </a:solidFill>
@@ -16017,7 +16043,7 @@
               <a:t>•  </a:t>
             </a:r>
             <a:r>
-              <a:rPr sz="1230">
+              <a:rPr sz="1120">
                 <a:solidFill>
                   <a:srgbClr val="16130F"/>
                 </a:solidFill>
@@ -16029,17 +16055,17 @@
           <a:p>
             <a:pPr algn="l">
               <a:lnSpc>
-                <a:spcPct val="104000"/>
-              </a:lnSpc>
-              <a:spcBef>
-                <a:spcPts val="0"/>
-              </a:spcBef>
-              <a:spcAft>
-                <a:spcPts val="500"/>
-              </a:spcAft>
-            </a:pPr>
-            <a:r>
-              <a:rPr sz="1230" b="1">
+                <a:spcPct val="102000"/>
+              </a:lnSpc>
+              <a:spcBef>
+                <a:spcPts val="0"/>
+              </a:spcBef>
+              <a:spcAft>
+                <a:spcPts val="300"/>
+              </a:spcAft>
+            </a:pPr>
+            <a:r>
+              <a:rPr sz="1120" b="1">
                 <a:solidFill>
                   <a:srgbClr val="BE4127"/>
                 </a:solidFill>
@@ -16048,7 +16074,7 @@
               <a:t>•  </a:t>
             </a:r>
             <a:r>
-              <a:rPr sz="1230">
+              <a:rPr sz="1120">
                 <a:solidFill>
                   <a:srgbClr val="16130F"/>
                 </a:solidFill>
